--- a/docs/毕业答辩PPT.pptx
+++ b/docs/毕业答辩PPT.pptx
@@ -3266,7 +3266,7 @@
               </a:defRPr>
             </a:pPr>
             <a:r>
-              <a:t>基于微服务架构的论坛系统</a:t>
+              <a:t>基于微服务架构的高校论坛系统</a:t>
             </a:r>
             <a:br/>
             <a:r>
@@ -6397,7 +6397,7 @@
               </a:defRPr>
             </a:pPr>
             <a:r>
-              <a:t>🧪 自动化回归测试 (12项场景)</a:t>
+              <a:t>🧪 功能测试 (11场景 · 22接口)</a:t>
             </a:r>
           </a:p>
         </p:txBody>
@@ -6439,7 +6439,7 @@
               </a:defRPr>
             </a:pPr>
             <a:r>
-              <a:t>✅ 分区读取验证</a:t>
+              <a:t>✅ 1. 获取分区列表</a:t>
             </a:r>
           </a:p>
           <a:p>
@@ -6458,7 +6458,7 @@
               </a:defRPr>
             </a:pPr>
             <a:r>
-              <a:t>✅ 双用户注册登录</a:t>
+              <a:t>✅ 2. 注册并登录两个用户</a:t>
             </a:r>
           </a:p>
           <a:p>
@@ -6477,7 +6477,7 @@
               </a:defRPr>
             </a:pPr>
             <a:r>
-              <a:t>✅ 发帖 → 评论 → 搜索 全链路</a:t>
+              <a:t>✅ 3. 发帖→评论→搜索 全链路</a:t>
             </a:r>
           </a:p>
           <a:p>
@@ -6496,7 +6496,7 @@
               </a:defRPr>
             </a:pPr>
             <a:r>
-              <a:t>✅ 通知与推荐模块接口</a:t>
+              <a:t>✅ 4. 通知首页与媒体首页</a:t>
             </a:r>
           </a:p>
           <a:p>
@@ -6515,7 +6515,7 @@
               </a:defRPr>
             </a:pPr>
             <a:r>
-              <a:t>✅ 我的通知读取与已读标记</a:t>
+              <a:t>✅ 5. 个人通知与标记已读</a:t>
             </a:r>
           </a:p>
           <a:p>
@@ -6534,7 +6534,7 @@
               </a:defRPr>
             </a:pPr>
             <a:r>
-              <a:t>✅ 无Token写操作拦截 (401)</a:t>
+              <a:t>✅ 6. 无Token写操作拦截 (code=4010)</a:t>
             </a:r>
           </a:p>
           <a:p>
@@ -6553,7 +6553,7 @@
               </a:defRPr>
             </a:pPr>
             <a:r>
-              <a:t>✅ 无权限操作拦截 (403)</a:t>
+              <a:t>✅ 7. 无权限操作拦截 (code=4031)</a:t>
             </a:r>
           </a:p>
           <a:p>
@@ -6572,7 +6572,7 @@
               </a:defRPr>
             </a:pPr>
             <a:r>
-              <a:t>✅ 并发重复点赞稳定性 (去重)</a:t>
+              <a:t>✅ 8. 并发重复点赞 ([0,4091])</a:t>
             </a:r>
           </a:p>
           <a:p>
@@ -6591,7 +6591,7 @@
               </a:defRPr>
             </a:pPr>
             <a:r>
-              <a:t>✅ 登出后会话立即失效</a:t>
+              <a:t>✅ 9. 登出后会话立即失效</a:t>
             </a:r>
           </a:p>
           <a:p>
@@ -6610,7 +6610,7 @@
               </a:defRPr>
             </a:pPr>
             <a:r>
-              <a:t>✅ Refresh Token 续签流程</a:t>
+              <a:t>✅ 10. 令牌刷新流程</a:t>
             </a:r>
           </a:p>
           <a:p>
@@ -6629,7 +6629,7 @@
               </a:defRPr>
             </a:pPr>
             <a:r>
-              <a:t>✅ Token 过期拦截</a:t>
+              <a:t>✅ 11. 令牌过期拦截</a:t>
             </a:r>
           </a:p>
           <a:p>
@@ -6648,7 +6648,7 @@
               </a:defRPr>
             </a:pPr>
             <a:r>
-              <a:t>通过率: 100% (所有场景全部通过)</a:t>
+              <a:t>全部22个API接口覆盖, 通过率100%</a:t>
             </a:r>
           </a:p>
         </p:txBody>
@@ -7061,7 +7061,7 @@
                         </a:defRPr>
                       </a:pPr>
                       <a:r>
-                        <a:t>回归测试通过率</a:t>
+                        <a:t>功能测试通过率</a:t>
                       </a:r>
                     </a:p>
                   </a:txBody>
@@ -7109,7 +7109,7 @@
                         </a:defRPr>
                       </a:pPr>
                       <a:r>
-                        <a:t>12项场景全部通过</a:t>
+                        <a:t>11场景·22接口</a:t>
                       </a:r>
                     </a:p>
                   </a:txBody>
@@ -7135,7 +7135,7 @@
                         </a:defRPr>
                       </a:pPr>
                       <a:r>
-                        <a:t>异常场景通过率</a:t>
+                        <a:t>并发负载测试</a:t>
                       </a:r>
                     </a:p>
                   </a:txBody>
@@ -7159,7 +7159,7 @@
                         </a:defRPr>
                       </a:pPr>
                       <a:r>
-                        <a:t>100%</a:t>
+                        <a:t>10/50/100用户</a:t>
                       </a:r>
                     </a:p>
                   </a:txBody>
@@ -7183,7 +7183,7 @@
                         </a:defRPr>
                       </a:pPr>
                       <a:r>
-                        <a:t>6项异常场景全部通过</a:t>
+                        <a:t>验证承载能力</a:t>
                       </a:r>
                     </a:p>
                   </a:txBody>
@@ -7362,7 +7362,7 @@
               </a:defRPr>
             </a:pPr>
             <a:r>
-              <a:t>• 测试方式: Python自动化脚本 (run_system_regression.py) + 缓存基准脚本 (benchmark_forum_cache.py)</a:t>
+              <a:t>• 功能测试: run_system_regression.py → 11场景全链路黑盒测试, 覆盖22个API接口</a:t>
             </a:r>
           </a:p>
           <a:p>
@@ -7381,7 +7381,7 @@
               </a:defRPr>
             </a:pPr>
             <a:r>
-              <a:t>• 覆盖范围: 全链路功能回归 + 异常场景 + 性能基准 + 并发稳定性</a:t>
+              <a:t>• 缓存基准: benchmark_forum_cache.py → 冷/热请求对比, P95延迟与提升幅度</a:t>
             </a:r>
           </a:p>
           <a:p>
@@ -7400,7 +7400,7 @@
               </a:defRPr>
             </a:pPr>
             <a:r>
-              <a:t>• 可复现性: 一键执行 (generate-test-reports.sh), 报告自动生成为Markdown文档</a:t>
+              <a:t>• 并发负载: load_test_concurrent.py → 10/50/100并发, 统计QPS/P95/成功率</a:t>
             </a:r>
           </a:p>
           <a:p>
@@ -7419,7 +7419,7 @@
               </a:defRPr>
             </a:pPr>
             <a:r>
-              <a:t>• 运维闭环: 启动脚本 → 验活检查 → 回归测试 → 报告产物, 全流程可重复执行</a:t>
+              <a:t>• 可复现性: 一键执行generate-test-reports.sh, 报告自动生成Markdown落盘</a:t>
             </a:r>
           </a:p>
         </p:txBody>
@@ -8075,7 +8075,7 @@
               </a:defRPr>
             </a:pPr>
             <a:r>
-              <a:t>⚠️ 局限性</a:t>
+              <a:t>⚠️ 存在的问题</a:t>
             </a:r>
           </a:p>
         </p:txBody>
@@ -8117,7 +8117,7 @@
               </a:defRPr>
             </a:pPr>
             <a:r>
-              <a:t>• 搜索功能基于内存过滤, 未引入全文搜索引擎</a:t>
+              <a:t>① 搜索服务基于内存遍历+contains匹配</a:t>
             </a:r>
           </a:p>
           <a:p>
@@ -8136,7 +8136,7 @@
               </a:defRPr>
             </a:pPr>
             <a:r>
-              <a:t>  (如Elasticsearch), 大数据量下效率受限</a:t>
+              <a:t>   帖子增长后效率下降, 不支持分词和相关度排序</a:t>
             </a:r>
           </a:p>
           <a:p>
@@ -8171,7 +8171,7 @@
               </a:defRPr>
             </a:pPr>
             <a:r>
-              <a:t>• 媒体推荐为静态数据, 未接入推荐算法</a:t>
+              <a:t>② 日志采集与监控机制尚未建立</a:t>
             </a:r>
           </a:p>
           <a:p>
@@ -8189,6 +8189,9 @@
                 <a:latin typeface="微软雅黑"/>
               </a:defRPr>
             </a:pPr>
+            <a:r>
+              <a:t>   仅Spring Boot默认控制台日志, 缺乏统一收集平台</a:t>
+            </a:r>
           </a:p>
           <a:p>
             <a:pPr>
@@ -8205,9 +8208,6 @@
                 <a:latin typeface="微软雅黑"/>
               </a:defRPr>
             </a:pPr>
-            <a:r>
-              <a:t>• 系统未做高可用集群部署验证</a:t>
-            </a:r>
           </a:p>
           <a:p>
             <a:pPr>
@@ -8225,7 +8225,7 @@
               </a:defRPr>
             </a:pPr>
             <a:r>
-              <a:t>  (单实例部署, 未验证分布式容灾)</a:t>
+              <a:t>③ 部署架构未在云环境下生产级验证</a:t>
             </a:r>
           </a:p>
           <a:p>
@@ -8243,6 +8243,9 @@
                 <a:latin typeface="微软雅黑"/>
               </a:defRPr>
             </a:pPr>
+            <a:r>
+              <a:t>   全部测试在本地单机完成</a:t>
+            </a:r>
           </a:p>
           <a:p>
             <a:pPr>
@@ -8259,9 +8262,6 @@
                 <a:latin typeface="微软雅黑"/>
               </a:defRPr>
             </a:pPr>
-            <a:r>
-              <a:t>• 前端edit/delete功能API已就绪但UI未完整接入</a:t>
-            </a:r>
           </a:p>
           <a:p>
             <a:pPr>
@@ -8278,7 +8278,160 @@
                 <a:latin typeface="微软雅黑"/>
               </a:defRPr>
             </a:pPr>
-          </a:p>
+            <a:r>
+              <a:t>④ 安全测试和单元测试覆盖度有提升空间</a:t>
+            </a:r>
+          </a:p>
+        </p:txBody>
+      </p:sp>
+      <p:sp>
+        <p:nvSpPr>
+          <p:cNvPr id="14" name="Rounded Rectangle 13"/>
+          <p:cNvSpPr/>
+          <p:nvPr/>
+        </p:nvSpPr>
+        <p:spPr>
+          <a:xfrm>
+            <a:off x="365760" y="4480560"/>
+            <a:ext cx="11247120" cy="1828800"/>
+          </a:xfrm>
+          <a:prstGeom prst="roundRect">
+            <a:avLst>
+              <a:gd name="adj" fmla="val 5000"/>
+            </a:avLst>
+          </a:prstGeom>
+          <a:solidFill>
+            <a:srgbClr val="FFFFFF"/>
+          </a:solidFill>
+          <a:ln>
+            <a:noFill/>
+          </a:ln>
+          <a:effectLst/>
+        </p:spPr>
+        <p:style>
+          <a:lnRef idx="1">
+            <a:schemeClr val="accent1"/>
+          </a:lnRef>
+          <a:fillRef idx="3">
+            <a:schemeClr val="accent1"/>
+          </a:fillRef>
+          <a:effectRef idx="2">
+            <a:schemeClr val="accent1"/>
+          </a:effectRef>
+          <a:fontRef idx="minor">
+            <a:schemeClr val="lt1"/>
+          </a:fontRef>
+        </p:style>
+        <p:txBody>
+          <a:bodyPr rtlCol="0" anchor="ctr"/>
+          <a:lstStyle/>
+          <a:p>
+            <a:pPr algn="ctr"/>
+          </a:p>
+        </p:txBody>
+      </p:sp>
+      <p:sp>
+        <p:nvSpPr>
+          <p:cNvPr id="15" name="Rounded Rectangle 14"/>
+          <p:cNvSpPr/>
+          <p:nvPr/>
+        </p:nvSpPr>
+        <p:spPr>
+          <a:xfrm>
+            <a:off x="365760" y="4480560"/>
+            <a:ext cx="54864" cy="1828800"/>
+          </a:xfrm>
+          <a:prstGeom prst="roundRect">
+            <a:avLst>
+              <a:gd name="adj" fmla="val 0"/>
+            </a:avLst>
+          </a:prstGeom>
+          <a:solidFill>
+            <a:srgbClr val="1A56DB"/>
+          </a:solidFill>
+          <a:ln>
+            <a:noFill/>
+          </a:ln>
+        </p:spPr>
+        <p:style>
+          <a:lnRef idx="1">
+            <a:schemeClr val="accent1"/>
+          </a:lnRef>
+          <a:fillRef idx="3">
+            <a:schemeClr val="accent1"/>
+          </a:fillRef>
+          <a:effectRef idx="2">
+            <a:schemeClr val="accent1"/>
+          </a:effectRef>
+          <a:fontRef idx="minor">
+            <a:schemeClr val="lt1"/>
+          </a:fontRef>
+        </p:style>
+        <p:txBody>
+          <a:bodyPr rtlCol="0" anchor="ctr"/>
+          <a:lstStyle/>
+          <a:p>
+            <a:pPr algn="ctr"/>
+          </a:p>
+        </p:txBody>
+      </p:sp>
+      <p:sp>
+        <p:nvSpPr>
+          <p:cNvPr id="16" name="TextBox 15"/>
+          <p:cNvSpPr txBox="1"/>
+          <p:nvPr/>
+        </p:nvSpPr>
+        <p:spPr>
+          <a:xfrm>
+            <a:off x="640080" y="4617720"/>
+            <a:ext cx="10789920" cy="365760"/>
+          </a:xfrm>
+          <a:prstGeom prst="rect">
+            <a:avLst/>
+          </a:prstGeom>
+          <a:noFill/>
+        </p:spPr>
+        <p:txBody>
+          <a:bodyPr wrap="square">
+            <a:spAutoFit/>
+          </a:bodyPr>
+          <a:lstStyle/>
+          <a:p>
+            <a:pPr algn="l">
+              <a:defRPr sz="1600" b="1">
+                <a:solidFill>
+                  <a:srgbClr val="1A56DB"/>
+                </a:solidFill>
+                <a:latin typeface="微软雅黑"/>
+              </a:defRPr>
+            </a:pPr>
+            <a:r>
+              <a:t>🚀 未来优化方向</a:t>
+            </a:r>
+          </a:p>
+        </p:txBody>
+      </p:sp>
+      <p:sp>
+        <p:nvSpPr>
+          <p:cNvPr id="17" name="TextBox 16"/>
+          <p:cNvSpPr txBox="1"/>
+          <p:nvPr/>
+        </p:nvSpPr>
+        <p:spPr>
+          <a:xfrm>
+            <a:off x="640080" y="4983480"/>
+            <a:ext cx="10789920" cy="1188720"/>
+          </a:xfrm>
+          <a:prstGeom prst="rect">
+            <a:avLst/>
+          </a:prstGeom>
+          <a:noFill/>
+        </p:spPr>
+        <p:txBody>
+          <a:bodyPr wrap="square">
+            <a:spAutoFit/>
+          </a:bodyPr>
+          <a:lstStyle/>
           <a:p>
             <a:pPr>
               <a:spcBef>
@@ -8295,159 +8448,9 @@
               </a:defRPr>
             </a:pPr>
             <a:r>
-              <a:t>• 未引入CI/CD自动化流水线</a:t>
-            </a:r>
-          </a:p>
-        </p:txBody>
-      </p:sp>
-      <p:sp>
-        <p:nvSpPr>
-          <p:cNvPr id="14" name="Rounded Rectangle 13"/>
-          <p:cNvSpPr/>
-          <p:nvPr/>
-        </p:nvSpPr>
-        <p:spPr>
-          <a:xfrm>
-            <a:off x="365760" y="4480560"/>
-            <a:ext cx="11247120" cy="1828800"/>
-          </a:xfrm>
-          <a:prstGeom prst="roundRect">
-            <a:avLst>
-              <a:gd name="adj" fmla="val 5000"/>
-            </a:avLst>
-          </a:prstGeom>
-          <a:solidFill>
-            <a:srgbClr val="FFFFFF"/>
-          </a:solidFill>
-          <a:ln>
-            <a:noFill/>
-          </a:ln>
-          <a:effectLst/>
-        </p:spPr>
-        <p:style>
-          <a:lnRef idx="1">
-            <a:schemeClr val="accent1"/>
-          </a:lnRef>
-          <a:fillRef idx="3">
-            <a:schemeClr val="accent1"/>
-          </a:fillRef>
-          <a:effectRef idx="2">
-            <a:schemeClr val="accent1"/>
-          </a:effectRef>
-          <a:fontRef idx="minor">
-            <a:schemeClr val="lt1"/>
-          </a:fontRef>
-        </p:style>
-        <p:txBody>
-          <a:bodyPr rtlCol="0" anchor="ctr"/>
-          <a:lstStyle/>
-          <a:p>
-            <a:pPr algn="ctr"/>
-          </a:p>
-        </p:txBody>
-      </p:sp>
-      <p:sp>
-        <p:nvSpPr>
-          <p:cNvPr id="15" name="Rounded Rectangle 14"/>
-          <p:cNvSpPr/>
-          <p:nvPr/>
-        </p:nvSpPr>
-        <p:spPr>
-          <a:xfrm>
-            <a:off x="365760" y="4480560"/>
-            <a:ext cx="54864" cy="1828800"/>
-          </a:xfrm>
-          <a:prstGeom prst="roundRect">
-            <a:avLst>
-              <a:gd name="adj" fmla="val 0"/>
-            </a:avLst>
-          </a:prstGeom>
-          <a:solidFill>
-            <a:srgbClr val="1A56DB"/>
-          </a:solidFill>
-          <a:ln>
-            <a:noFill/>
-          </a:ln>
-        </p:spPr>
-        <p:style>
-          <a:lnRef idx="1">
-            <a:schemeClr val="accent1"/>
-          </a:lnRef>
-          <a:fillRef idx="3">
-            <a:schemeClr val="accent1"/>
-          </a:fillRef>
-          <a:effectRef idx="2">
-            <a:schemeClr val="accent1"/>
-          </a:effectRef>
-          <a:fontRef idx="minor">
-            <a:schemeClr val="lt1"/>
-          </a:fontRef>
-        </p:style>
-        <p:txBody>
-          <a:bodyPr rtlCol="0" anchor="ctr"/>
-          <a:lstStyle/>
-          <a:p>
-            <a:pPr algn="ctr"/>
-          </a:p>
-        </p:txBody>
-      </p:sp>
-      <p:sp>
-        <p:nvSpPr>
-          <p:cNvPr id="16" name="TextBox 15"/>
-          <p:cNvSpPr txBox="1"/>
-          <p:nvPr/>
-        </p:nvSpPr>
-        <p:spPr>
-          <a:xfrm>
-            <a:off x="640080" y="4617720"/>
-            <a:ext cx="10789920" cy="365760"/>
-          </a:xfrm>
-          <a:prstGeom prst="rect">
-            <a:avLst/>
-          </a:prstGeom>
-          <a:noFill/>
-        </p:spPr>
-        <p:txBody>
-          <a:bodyPr wrap="square">
-            <a:spAutoFit/>
-          </a:bodyPr>
-          <a:lstStyle/>
-          <a:p>
-            <a:pPr algn="l">
-              <a:defRPr sz="1600" b="1">
-                <a:solidFill>
-                  <a:srgbClr val="1A56DB"/>
-                </a:solidFill>
-                <a:latin typeface="微软雅黑"/>
-              </a:defRPr>
-            </a:pPr>
-            <a:r>
-              <a:t>🚀 未来优化方向</a:t>
-            </a:r>
-          </a:p>
-        </p:txBody>
-      </p:sp>
-      <p:sp>
-        <p:nvSpPr>
-          <p:cNvPr id="17" name="TextBox 16"/>
-          <p:cNvSpPr txBox="1"/>
-          <p:nvPr/>
-        </p:nvSpPr>
-        <p:spPr>
-          <a:xfrm>
-            <a:off x="640080" y="4983480"/>
-            <a:ext cx="10789920" cy="1188720"/>
-          </a:xfrm>
-          <a:prstGeom prst="rect">
-            <a:avLst/>
-          </a:prstGeom>
-          <a:noFill/>
-        </p:spPr>
-        <p:txBody>
-          <a:bodyPr wrap="square">
-            <a:spAutoFit/>
-          </a:bodyPr>
-          <a:lstStyle/>
+              <a:t>① 引入 Elasticsearch 全文搜索 → 倒排索引+分词分析器, 提升检索精度和速度</a:t>
+            </a:r>
+          </a:p>
           <a:p>
             <a:pPr>
               <a:spcBef>
@@ -8464,7 +8467,7 @@
               </a:defRPr>
             </a:pPr>
             <a:r>
-              <a:t>① 引入 Elasticsearch 实现全文搜索 + 高亮 + 权重排序 → 提升大规模内容检索效率</a:t>
+              <a:t>② ELK日志采集栈 + 链路追踪 → 实现分布式系统可观测性</a:t>
             </a:r>
           </a:p>
           <a:p>
@@ -8483,7 +8486,7 @@
               </a:defRPr>
             </a:pPr>
             <a:r>
-              <a:t>② 接入推荐算法（协同过滤/内容匹配）→ 实现个性化内容推荐</a:t>
+              <a:t>③ Kubernetes集群部署 + CDN → 弹性伸缩、滚动更新、静态资源加速</a:t>
             </a:r>
           </a:p>
           <a:p>
@@ -8502,45 +8505,7 @@
               </a:defRPr>
             </a:pPr>
             <a:r>
-              <a:t>③ 多实例部署 + Kubernetes编排 → 实现高可用与弹性扩缩容</a:t>
-            </a:r>
-          </a:p>
-          <a:p>
-            <a:pPr>
-              <a:spcBef>
-                <a:spcPts val="300"/>
-              </a:spcBef>
-              <a:spcAft>
-                <a:spcPts val="200"/>
-              </a:spcAft>
-              <a:defRPr sz="1300">
-                <a:solidFill>
-                  <a:srgbClr val="202C3C"/>
-                </a:solidFill>
-                <a:latin typeface="微软雅黑"/>
-              </a:defRPr>
-            </a:pPr>
-            <a:r>
-              <a:t>④ 引入消息队列（RocketMQ/Kafka）→ 异步通知、服务解耦</a:t>
-            </a:r>
-          </a:p>
-          <a:p>
-            <a:pPr>
-              <a:spcBef>
-                <a:spcPts val="300"/>
-              </a:spcBef>
-              <a:spcAft>
-                <a:spcPts val="200"/>
-              </a:spcAft>
-              <a:defRPr sz="1300">
-                <a:solidFill>
-                  <a:srgbClr val="202C3C"/>
-                </a:solidFill>
-                <a:latin typeface="微软雅黑"/>
-              </a:defRPr>
-            </a:pPr>
-            <a:r>
-              <a:t>⑤ 前端 SSR + PWA → 提升首屏性能和移动端离线体验</a:t>
+              <a:t>④ OWASP ZAP安全扫描 + JUnit单元测试 → 完善质量保障体系</a:t>
             </a:r>
           </a:p>
         </p:txBody>
@@ -10339,7 +10304,7 @@
               </a:defRPr>
             </a:pPr>
             <a:r>
-              <a:t>• 高校交流场景碎片化：教学通知分散在课程平台、班级群等多渠道</a:t>
+              <a:t>• 即时通讯中课程答疑几小时后即被新消息覆盖</a:t>
             </a:r>
           </a:p>
           <a:p>
@@ -10358,7 +10323,7 @@
               </a:defRPr>
             </a:pPr>
             <a:r>
-              <a:t>• 信息版本不一致、上下文断裂、历史结论难追溯</a:t>
+              <a:t>• 高校论坛多为单体架构，并发瓶颈、扩展困难</a:t>
             </a:r>
           </a:p>
           <a:p>
@@ -10377,7 +10342,7 @@
               </a:defRPr>
             </a:pPr>
             <a:r>
-              <a:t>• AI工具普及后内容生产加速，信息密集但有效触达率低</a:t>
+              <a:t>• 多数仅PC端，移动端用户占比已达99.6%(CNNIC)</a:t>
             </a:r>
           </a:p>
           <a:p>
@@ -10396,7 +10361,7 @@
               </a:defRPr>
             </a:pPr>
             <a:r>
-              <a:t>• 传统论坛系统功能单一，工程可维护性差</a:t>
+              <a:t>• 功能验证依赖手工操作，交付质量缺少量化判据</a:t>
             </a:r>
           </a:p>
         </p:txBody>
@@ -10565,7 +10530,7 @@
               </a:defRPr>
             </a:pPr>
             <a:r>
-              <a:t>• 单体架构 → 模块耦合高、扩展性差</a:t>
+              <a:t>• 单体架构 → 前后端耦合、局部修改需全局重部署</a:t>
             </a:r>
           </a:p>
           <a:p>
@@ -10584,7 +10549,7 @@
               </a:defRPr>
             </a:pPr>
             <a:r>
-              <a:t>• 仅PC端 → 移动端体验缺失</a:t>
+              <a:t>• 仅PC端 → 移动端体验缺失(如水木BBS、未名BBS)</a:t>
             </a:r>
           </a:p>
           <a:p>
@@ -10603,7 +10568,7 @@
               </a:defRPr>
             </a:pPr>
             <a:r>
-              <a:t>• 缺少统一鉴权 → 安全边界模糊</a:t>
+              <a:t>• 权限管理与内容审核机制不完善</a:t>
             </a:r>
           </a:p>
           <a:p>
@@ -10622,7 +10587,7 @@
               </a:defRPr>
             </a:pPr>
             <a:r>
-              <a:t>• 无自动化测试 → 交付质量不可控</a:t>
+              <a:t>• 缺乏自动化回归测试和性能测试</a:t>
             </a:r>
           </a:p>
           <a:p>
@@ -10641,7 +10606,7 @@
               </a:defRPr>
             </a:pPr>
             <a:r>
-              <a:t>• 缺乏缓存机制 → 高并发下性能瓶颈</a:t>
+              <a:t>• 源码冗余度高，维护成本持续增加</a:t>
             </a:r>
           </a:p>
         </p:txBody>
@@ -10810,7 +10775,7 @@
               </a:defRPr>
             </a:pPr>
             <a:r>
-              <a:t>① 微服务架构（6个独立服务） → 松耦合、可独立部署与扩展</a:t>
+              <a:t>① 微服务拆分（5个业务服务+网关） → 松耦合、可独立部署与扩展</a:t>
             </a:r>
           </a:p>
           <a:p>
@@ -10886,7 +10851,7 @@
               </a:defRPr>
             </a:pPr>
             <a:r>
-              <a:t>⑤ 可复现测试链路（回归脚本 + 缓存基准 + 一键启停） → 工程质量可验证</a:t>
+              <a:t>⑤ 可复现测试链路 → 功能测试覆盖11场景22接口，通过率100%</a:t>
             </a:r>
           </a:p>
         </p:txBody>
@@ -11189,7 +11154,7 @@
               </a:defRPr>
             </a:pPr>
             <a:r>
-              <a:t>🔧 功能性需求</a:t>
+              <a:t>🔧 功能性需求（8个模块）</a:t>
             </a:r>
           </a:p>
         </p:txBody>
@@ -11231,7 +11196,7 @@
               </a:defRPr>
             </a:pPr>
             <a:r>
-              <a:t>用户管理：注册/登录/登出/个人信息/会话管理</a:t>
+              <a:t>用户认证：注册/登录/令牌刷新/登出/失败锁定</a:t>
             </a:r>
           </a:p>
           <a:p>
@@ -11250,7 +11215,7 @@
               </a:defRPr>
             </a:pPr>
             <a:r>
-              <a:t>论坛核心：分区浏览/发帖/编辑/删除/详情查看</a:t>
+              <a:t>帖子管理：分区浏览/发帖/编辑/删除/详情</a:t>
             </a:r>
           </a:p>
           <a:p>
@@ -11269,7 +11234,7 @@
               </a:defRPr>
             </a:pPr>
             <a:r>
-              <a:t>互动功能：评论(含二级回复)/点赞(去重)/搜索</a:t>
+              <a:t>评论互动：一级评论/二级回复/编辑/删除</a:t>
             </a:r>
           </a:p>
           <a:p>
@@ -11288,7 +11253,7 @@
               </a:defRPr>
             </a:pPr>
             <a:r>
-              <a:t>通知系统：系统公告/个人通知/标记已读</a:t>
+              <a:t>点赞：去重点赞(联合唯一约束)</a:t>
             </a:r>
           </a:p>
           <a:p>
@@ -11307,7 +11272,7 @@
               </a:defRPr>
             </a:pPr>
             <a:r>
-              <a:t>推荐模块：音乐/书籍推荐（首页展示）</a:t>
+              <a:t>通知服务：系统公告/个人通知/标记已读</a:t>
             </a:r>
           </a:p>
           <a:p>
@@ -11326,7 +11291,7 @@
               </a:defRPr>
             </a:pPr>
             <a:r>
-              <a:t>双端支持：PC端 + 移动端 完整功能覆盖</a:t>
+              <a:t>搜索/媒体/网关访问控制</a:t>
             </a:r>
           </a:p>
         </p:txBody>
@@ -11453,7 +11418,7 @@
               </a:defRPr>
             </a:pPr>
             <a:r>
-              <a:t>📊 非功能性需求</a:t>
+              <a:t>📊 非功能性需求（5个维度）</a:t>
             </a:r>
           </a:p>
         </p:txBody>
@@ -11495,7 +11460,7 @@
               </a:defRPr>
             </a:pPr>
             <a:r>
-              <a:t>性能：帖子列表缓存命中后响应 ≤ 10ms (P95)</a:t>
+              <a:t>性能：缓存命中后毫秒级响应, 未命中≤500ms</a:t>
             </a:r>
           </a:p>
           <a:p>
@@ -11514,7 +11479,7 @@
               </a:defRPr>
             </a:pPr>
             <a:r>
-              <a:t>安全：JWT双令牌 + 会话校验 + 登录失败锁定</a:t>
+              <a:t>安全：JWT双令牌(Access 24h/Refresh 7d)+失败锁定</a:t>
             </a:r>
           </a:p>
           <a:p>
@@ -11533,7 +11498,7 @@
               </a:defRPr>
             </a:pPr>
             <a:r>
-              <a:t>可用性：一键启停脚本 + 健康检查验活</a:t>
+              <a:t>可扩展：Nacos注册发现, 新模块即插即用</a:t>
             </a:r>
           </a:p>
           <a:p>
@@ -11552,7 +11517,7 @@
               </a:defRPr>
             </a:pPr>
             <a:r>
-              <a:t>可测试性：自动化回归12项场景 + 缓存基准</a:t>
+              <a:t>可维护：Docker Compose编排+一键启停+自动回归</a:t>
             </a:r>
           </a:p>
           <a:p>
@@ -11571,9 +11536,159 @@
               </a:defRPr>
             </a:pPr>
             <a:r>
-              <a:t>可维护性：服务独立部署、统一接口规范</a:t>
-            </a:r>
-          </a:p>
+              <a:t>兼容：PC(Element Plus)+移动(Vant), 同API网关</a:t>
+            </a:r>
+          </a:p>
+        </p:txBody>
+      </p:sp>
+      <p:sp>
+        <p:nvSpPr>
+          <p:cNvPr id="14" name="Rounded Rectangle 13"/>
+          <p:cNvSpPr/>
+          <p:nvPr/>
+        </p:nvSpPr>
+        <p:spPr>
+          <a:xfrm>
+            <a:off x="457200" y="4297680"/>
+            <a:ext cx="11247120" cy="2103120"/>
+          </a:xfrm>
+          <a:prstGeom prst="roundRect">
+            <a:avLst>
+              <a:gd name="adj" fmla="val 5000"/>
+            </a:avLst>
+          </a:prstGeom>
+          <a:solidFill>
+            <a:srgbClr val="FFFFFF"/>
+          </a:solidFill>
+          <a:ln>
+            <a:noFill/>
+          </a:ln>
+          <a:effectLst/>
+        </p:spPr>
+        <p:style>
+          <a:lnRef idx="1">
+            <a:schemeClr val="accent1"/>
+          </a:lnRef>
+          <a:fillRef idx="3">
+            <a:schemeClr val="accent1"/>
+          </a:fillRef>
+          <a:effectRef idx="2">
+            <a:schemeClr val="accent1"/>
+          </a:effectRef>
+          <a:fontRef idx="minor">
+            <a:schemeClr val="lt1"/>
+          </a:fontRef>
+        </p:style>
+        <p:txBody>
+          <a:bodyPr rtlCol="0" anchor="ctr"/>
+          <a:lstStyle/>
+          <a:p>
+            <a:pPr algn="ctr"/>
+          </a:p>
+        </p:txBody>
+      </p:sp>
+      <p:sp>
+        <p:nvSpPr>
+          <p:cNvPr id="15" name="Rounded Rectangle 14"/>
+          <p:cNvSpPr/>
+          <p:nvPr/>
+        </p:nvSpPr>
+        <p:spPr>
+          <a:xfrm>
+            <a:off x="457200" y="4297680"/>
+            <a:ext cx="54864" cy="2103120"/>
+          </a:xfrm>
+          <a:prstGeom prst="roundRect">
+            <a:avLst>
+              <a:gd name="adj" fmla="val 0"/>
+            </a:avLst>
+          </a:prstGeom>
+          <a:solidFill>
+            <a:srgbClr val="1A56DB"/>
+          </a:solidFill>
+          <a:ln>
+            <a:noFill/>
+          </a:ln>
+        </p:spPr>
+        <p:style>
+          <a:lnRef idx="1">
+            <a:schemeClr val="accent1"/>
+          </a:lnRef>
+          <a:fillRef idx="3">
+            <a:schemeClr val="accent1"/>
+          </a:fillRef>
+          <a:effectRef idx="2">
+            <a:schemeClr val="accent1"/>
+          </a:effectRef>
+          <a:fontRef idx="minor">
+            <a:schemeClr val="lt1"/>
+          </a:fontRef>
+        </p:style>
+        <p:txBody>
+          <a:bodyPr rtlCol="0" anchor="ctr"/>
+          <a:lstStyle/>
+          <a:p>
+            <a:pPr algn="ctr"/>
+          </a:p>
+        </p:txBody>
+      </p:sp>
+      <p:sp>
+        <p:nvSpPr>
+          <p:cNvPr id="16" name="TextBox 15"/>
+          <p:cNvSpPr txBox="1"/>
+          <p:nvPr/>
+        </p:nvSpPr>
+        <p:spPr>
+          <a:xfrm>
+            <a:off x="731520" y="4434840"/>
+            <a:ext cx="10789920" cy="365760"/>
+          </a:xfrm>
+          <a:prstGeom prst="rect">
+            <a:avLst/>
+          </a:prstGeom>
+          <a:noFill/>
+        </p:spPr>
+        <p:txBody>
+          <a:bodyPr wrap="square">
+            <a:spAutoFit/>
+          </a:bodyPr>
+          <a:lstStyle/>
+          <a:p>
+            <a:pPr algn="l">
+              <a:defRPr sz="1600" b="1">
+                <a:solidFill>
+                  <a:srgbClr val="1A56DB"/>
+                </a:solidFill>
+                <a:latin typeface="微软雅黑"/>
+              </a:defRPr>
+            </a:pPr>
+            <a:r>
+              <a:t>🎯 研究目标与技术路线</a:t>
+            </a:r>
+          </a:p>
+        </p:txBody>
+      </p:sp>
+      <p:sp>
+        <p:nvSpPr>
+          <p:cNvPr id="17" name="TextBox 16"/>
+          <p:cNvSpPr txBox="1"/>
+          <p:nvPr/>
+        </p:nvSpPr>
+        <p:spPr>
+          <a:xfrm>
+            <a:off x="731520" y="4800600"/>
+            <a:ext cx="10789920" cy="1463040"/>
+          </a:xfrm>
+          <a:prstGeom prst="rect">
+            <a:avLst/>
+          </a:prstGeom>
+          <a:noFill/>
+        </p:spPr>
+        <p:txBody>
+          <a:bodyPr wrap="square">
+            <a:spAutoFit/>
+          </a:bodyPr>
+          <a:lstStyle/>
           <a:p>
             <a:pPr>
               <a:spcBef>
@@ -11590,159 +11705,9 @@
               </a:defRPr>
             </a:pPr>
             <a:r>
-              <a:t>兼容性：PC浏览器 + 移动端浏览器</a:t>
-            </a:r>
-          </a:p>
-        </p:txBody>
-      </p:sp>
-      <p:sp>
-        <p:nvSpPr>
-          <p:cNvPr id="14" name="Rounded Rectangle 13"/>
-          <p:cNvSpPr/>
-          <p:nvPr/>
-        </p:nvSpPr>
-        <p:spPr>
-          <a:xfrm>
-            <a:off x="457200" y="4297680"/>
-            <a:ext cx="11247120" cy="2103120"/>
-          </a:xfrm>
-          <a:prstGeom prst="roundRect">
-            <a:avLst>
-              <a:gd name="adj" fmla="val 5000"/>
-            </a:avLst>
-          </a:prstGeom>
-          <a:solidFill>
-            <a:srgbClr val="FFFFFF"/>
-          </a:solidFill>
-          <a:ln>
-            <a:noFill/>
-          </a:ln>
-          <a:effectLst/>
-        </p:spPr>
-        <p:style>
-          <a:lnRef idx="1">
-            <a:schemeClr val="accent1"/>
-          </a:lnRef>
-          <a:fillRef idx="3">
-            <a:schemeClr val="accent1"/>
-          </a:fillRef>
-          <a:effectRef idx="2">
-            <a:schemeClr val="accent1"/>
-          </a:effectRef>
-          <a:fontRef idx="minor">
-            <a:schemeClr val="lt1"/>
-          </a:fontRef>
-        </p:style>
-        <p:txBody>
-          <a:bodyPr rtlCol="0" anchor="ctr"/>
-          <a:lstStyle/>
-          <a:p>
-            <a:pPr algn="ctr"/>
-          </a:p>
-        </p:txBody>
-      </p:sp>
-      <p:sp>
-        <p:nvSpPr>
-          <p:cNvPr id="15" name="Rounded Rectangle 14"/>
-          <p:cNvSpPr/>
-          <p:nvPr/>
-        </p:nvSpPr>
-        <p:spPr>
-          <a:xfrm>
-            <a:off x="457200" y="4297680"/>
-            <a:ext cx="54864" cy="2103120"/>
-          </a:xfrm>
-          <a:prstGeom prst="roundRect">
-            <a:avLst>
-              <a:gd name="adj" fmla="val 0"/>
-            </a:avLst>
-          </a:prstGeom>
-          <a:solidFill>
-            <a:srgbClr val="1A56DB"/>
-          </a:solidFill>
-          <a:ln>
-            <a:noFill/>
-          </a:ln>
-        </p:spPr>
-        <p:style>
-          <a:lnRef idx="1">
-            <a:schemeClr val="accent1"/>
-          </a:lnRef>
-          <a:fillRef idx="3">
-            <a:schemeClr val="accent1"/>
-          </a:fillRef>
-          <a:effectRef idx="2">
-            <a:schemeClr val="accent1"/>
-          </a:effectRef>
-          <a:fontRef idx="minor">
-            <a:schemeClr val="lt1"/>
-          </a:fontRef>
-        </p:style>
-        <p:txBody>
-          <a:bodyPr rtlCol="0" anchor="ctr"/>
-          <a:lstStyle/>
-          <a:p>
-            <a:pPr algn="ctr"/>
-          </a:p>
-        </p:txBody>
-      </p:sp>
-      <p:sp>
-        <p:nvSpPr>
-          <p:cNvPr id="16" name="TextBox 15"/>
-          <p:cNvSpPr txBox="1"/>
-          <p:nvPr/>
-        </p:nvSpPr>
-        <p:spPr>
-          <a:xfrm>
-            <a:off x="731520" y="4434840"/>
-            <a:ext cx="10789920" cy="365760"/>
-          </a:xfrm>
-          <a:prstGeom prst="rect">
-            <a:avLst/>
-          </a:prstGeom>
-          <a:noFill/>
-        </p:spPr>
-        <p:txBody>
-          <a:bodyPr wrap="square">
-            <a:spAutoFit/>
-          </a:bodyPr>
-          <a:lstStyle/>
-          <a:p>
-            <a:pPr algn="l">
-              <a:defRPr sz="1600" b="1">
-                <a:solidFill>
-                  <a:srgbClr val="1A56DB"/>
-                </a:solidFill>
-                <a:latin typeface="微软雅黑"/>
-              </a:defRPr>
-            </a:pPr>
-            <a:r>
-              <a:t>🎯 研究目标与技术路线</a:t>
-            </a:r>
-          </a:p>
-        </p:txBody>
-      </p:sp>
-      <p:sp>
-        <p:nvSpPr>
-          <p:cNvPr id="17" name="TextBox 16"/>
-          <p:cNvSpPr txBox="1"/>
-          <p:nvPr/>
-        </p:nvSpPr>
-        <p:spPr>
-          <a:xfrm>
-            <a:off x="731520" y="4800600"/>
-            <a:ext cx="10789920" cy="1463040"/>
-          </a:xfrm>
-          <a:prstGeom prst="rect">
-            <a:avLst/>
-          </a:prstGeom>
-          <a:noFill/>
-        </p:spPr>
-        <p:txBody>
-          <a:bodyPr wrap="square">
-            <a:spAutoFit/>
-          </a:bodyPr>
-          <a:lstStyle/>
+              <a:t>目标：设计并实现一个面向高校场景的微服务论坛系统，围绕架构解耦、跨平台适配、安全认证、质量保障四个层面展开</a:t>
+            </a:r>
+          </a:p>
           <a:p>
             <a:pPr>
               <a:spcBef>
@@ -11759,26 +11724,7 @@
               </a:defRPr>
             </a:pPr>
             <a:r>
-              <a:t>目标：设计并实现一个面向高校场景的微服务论坛系统，解决信息碎片化和系统可维护性问题</a:t>
-            </a:r>
-          </a:p>
-          <a:p>
-            <a:pPr>
-              <a:spcBef>
-                <a:spcPts val="300"/>
-              </a:spcBef>
-              <a:spcAft>
-                <a:spcPts val="200"/>
-              </a:spcAft>
-              <a:defRPr sz="1300">
-                <a:solidFill>
-                  <a:srgbClr val="202C3C"/>
-                </a:solidFill>
-                <a:latin typeface="微软雅黑"/>
-              </a:defRPr>
-            </a:pPr>
-            <a:r>
-              <a:t>技术路线：需求调研 → 架构设计（微服务拆分） → 核心服务开发 → 双端前端开发 → 缓存与安全加固 → 自动化测试与验收</a:t>
+              <a:t>技术路线：需求调研 → 微服务拆分设计 → 后端6服务开发 → 双端前端开发 → 安全与缓存加固 → 运维脚本与自动化测试</a:t>
             </a:r>
           </a:p>
         </p:txBody>
